--- a/set/2026-10-18 ECBC-CH.pptx
+++ b/set/2026-10-18 ECBC-CH.pptx
@@ -299,7 +299,7 @@
           <a:p>
             <a:fld id="{E759A0DE-F190-5444-87AC-4719D5F20D15}" type="datetimeFigureOut">
               <a:rPr lang="en-US" smtClean="0"/>
-              <a:t>10/16/26</a:t>
+              <a:t>10/17/26</a:t>
             </a:fld>
             <a:endParaRPr lang="en-US"/>
           </a:p>
@@ -497,7 +497,7 @@
           <a:p>
             <a:fld id="{E759A0DE-F190-5444-87AC-4719D5F20D15}" type="datetimeFigureOut">
               <a:rPr lang="en-US" smtClean="0"/>
-              <a:t>10/16/26</a:t>
+              <a:t>10/17/26</a:t>
             </a:fld>
             <a:endParaRPr lang="en-US"/>
           </a:p>
@@ -705,7 +705,7 @@
           <a:p>
             <a:fld id="{E759A0DE-F190-5444-87AC-4719D5F20D15}" type="datetimeFigureOut">
               <a:rPr lang="en-US" smtClean="0"/>
-              <a:t>10/16/26</a:t>
+              <a:t>10/17/26</a:t>
             </a:fld>
             <a:endParaRPr lang="en-US"/>
           </a:p>
@@ -903,7 +903,7 @@
           <a:p>
             <a:fld id="{E759A0DE-F190-5444-87AC-4719D5F20D15}" type="datetimeFigureOut">
               <a:rPr lang="en-US" smtClean="0"/>
-              <a:t>10/16/26</a:t>
+              <a:t>10/17/26</a:t>
             </a:fld>
             <a:endParaRPr lang="en-US"/>
           </a:p>
@@ -1178,7 +1178,7 @@
           <a:p>
             <a:fld id="{E759A0DE-F190-5444-87AC-4719D5F20D15}" type="datetimeFigureOut">
               <a:rPr lang="en-US" smtClean="0"/>
-              <a:t>10/16/26</a:t>
+              <a:t>10/17/26</a:t>
             </a:fld>
             <a:endParaRPr lang="en-US"/>
           </a:p>
@@ -1443,7 +1443,7 @@
           <a:p>
             <a:fld id="{E759A0DE-F190-5444-87AC-4719D5F20D15}" type="datetimeFigureOut">
               <a:rPr lang="en-US" smtClean="0"/>
-              <a:t>10/16/26</a:t>
+              <a:t>10/17/26</a:t>
             </a:fld>
             <a:endParaRPr lang="en-US"/>
           </a:p>
@@ -1855,7 +1855,7 @@
           <a:p>
             <a:fld id="{E759A0DE-F190-5444-87AC-4719D5F20D15}" type="datetimeFigureOut">
               <a:rPr lang="en-US" smtClean="0"/>
-              <a:t>10/16/26</a:t>
+              <a:t>10/17/26</a:t>
             </a:fld>
             <a:endParaRPr lang="en-US"/>
           </a:p>
@@ -1996,7 +1996,7 @@
           <a:p>
             <a:fld id="{E759A0DE-F190-5444-87AC-4719D5F20D15}" type="datetimeFigureOut">
               <a:rPr lang="en-US" smtClean="0"/>
-              <a:t>10/16/26</a:t>
+              <a:t>10/17/26</a:t>
             </a:fld>
             <a:endParaRPr lang="en-US"/>
           </a:p>
@@ -2109,7 +2109,7 @@
           <a:p>
             <a:fld id="{E759A0DE-F190-5444-87AC-4719D5F20D15}" type="datetimeFigureOut">
               <a:rPr lang="en-US" smtClean="0"/>
-              <a:t>10/16/26</a:t>
+              <a:t>10/17/26</a:t>
             </a:fld>
             <a:endParaRPr lang="en-US"/>
           </a:p>
@@ -2420,7 +2420,7 @@
           <a:p>
             <a:fld id="{E759A0DE-F190-5444-87AC-4719D5F20D15}" type="datetimeFigureOut">
               <a:rPr lang="en-US" smtClean="0"/>
-              <a:t>10/16/26</a:t>
+              <a:t>10/17/26</a:t>
             </a:fld>
             <a:endParaRPr lang="en-US"/>
           </a:p>
@@ -2708,7 +2708,7 @@
           <a:p>
             <a:fld id="{E759A0DE-F190-5444-87AC-4719D5F20D15}" type="datetimeFigureOut">
               <a:rPr lang="en-US" smtClean="0"/>
-              <a:t>10/16/26</a:t>
+              <a:t>10/17/26</a:t>
             </a:fld>
             <a:endParaRPr lang="en-US"/>
           </a:p>
@@ -2949,7 +2949,7 @@
           <a:p>
             <a:fld id="{E759A0DE-F190-5444-87AC-4719D5F20D15}" type="datetimeFigureOut">
               <a:rPr lang="en-US" smtClean="0"/>
-              <a:t>10/16/26</a:t>
+              <a:t>10/17/26</a:t>
             </a:fld>
             <a:endParaRPr lang="en-US"/>
           </a:p>
@@ -6873,7 +6873,7 @@
                 <a:latin typeface="Avenir Medium" panose="02000503020000020003" pitchFamily="2" charset="0"/>
                 <a:ea typeface="Bodoni Ornaments" pitchFamily="2" charset="0"/>
               </a:rPr>
-              <a:t>                Am                        C</a:t>
+              <a:t>                Am	G        F           G</a:t>
             </a:r>
           </a:p>
           <a:p>
@@ -6899,7 +6899,7 @@
                 <a:latin typeface="Avenir Medium" panose="02000503020000020003" pitchFamily="2" charset="0"/>
                 <a:ea typeface="Bodoni Ornaments" pitchFamily="2" charset="0"/>
               </a:rPr>
-              <a:t>                 C        G                 C</a:t>
+              <a:t>                 C        F                 G</a:t>
             </a:r>
           </a:p>
           <a:p>
@@ -9782,7 +9782,7 @@
                 <a:latin typeface="Avenir Medium" panose="02000503020000020003" pitchFamily="2" charset="0"/>
                 <a:ea typeface="Bodoni Ornaments" pitchFamily="2" charset="0"/>
               </a:rPr>
-              <a:t>                    F                           G</a:t>
+              <a:t>                    F             G			C</a:t>
             </a:r>
           </a:p>
           <a:p>
@@ -12537,7 +12537,7 @@
                 <a:latin typeface="Avenir Medium" panose="02000503020000020003" pitchFamily="2" charset="0"/>
                 <a:ea typeface="Bodoni Ornaments" pitchFamily="2" charset="0"/>
               </a:rPr>
-              <a:t>                 Am                                   G</a:t>
+              <a:t>                 Am	G        F           G</a:t>
             </a:r>
           </a:p>
           <a:p>
@@ -12563,7 +12563,7 @@
                 <a:latin typeface="Avenir Medium" panose="02000503020000020003" pitchFamily="2" charset="0"/>
                 <a:ea typeface="Bodoni Ornaments" pitchFamily="2" charset="0"/>
               </a:rPr>
-              <a:t>                   C          G                C</a:t>
+              <a:t>                   C        F                 G</a:t>
             </a:r>
           </a:p>
           <a:p>
@@ -13236,7 +13236,7 @@
                 <a:latin typeface="Avenir Medium" panose="02000503020000020003" pitchFamily="2" charset="0"/>
                 <a:ea typeface="Bodoni Ornaments" pitchFamily="2" charset="0"/>
               </a:rPr>
-              <a:t>                    F                           G</a:t>
+              <a:t>                     F             G			C</a:t>
             </a:r>
           </a:p>
           <a:p>
@@ -13480,7 +13480,7 @@
                 <a:latin typeface="Avenir Medium" panose="02000503020000020003" pitchFamily="2" charset="0"/>
                 <a:ea typeface="Bodoni Ornaments" pitchFamily="2" charset="0"/>
               </a:rPr>
-              <a:t>           Am                              G</a:t>
+              <a:t>           Am	G        F           G</a:t>
             </a:r>
           </a:p>
           <a:p>
@@ -13506,7 +13506,7 @@
                 <a:latin typeface="Avenir Medium" panose="02000503020000020003" pitchFamily="2" charset="0"/>
                 <a:ea typeface="Bodoni Ornaments" pitchFamily="2" charset="0"/>
               </a:rPr>
-              <a:t>                           C       G          C</a:t>
+              <a:t>                           C        F                 G</a:t>
             </a:r>
           </a:p>
           <a:p>
@@ -13729,7 +13729,7 @@
                 <a:latin typeface="Avenir Medium" panose="02000503020000020003" pitchFamily="2" charset="0"/>
                 <a:ea typeface="Bodoni Ornaments" pitchFamily="2" charset="0"/>
               </a:rPr>
-              <a:t>                    F                           G</a:t>
+              <a:t>                   F             G			C</a:t>
             </a:r>
           </a:p>
           <a:p>

--- a/set/2026-10-18 ECBC-CH.pptx
+++ b/set/2026-10-18 ECBC-CH.pptx
@@ -299,7 +299,7 @@
           <a:p>
             <a:fld id="{E759A0DE-F190-5444-87AC-4719D5F20D15}" type="datetimeFigureOut">
               <a:rPr lang="en-US" smtClean="0"/>
-              <a:t>10/17/26</a:t>
+              <a:t>10/18/26</a:t>
             </a:fld>
             <a:endParaRPr lang="en-US"/>
           </a:p>
@@ -497,7 +497,7 @@
           <a:p>
             <a:fld id="{E759A0DE-F190-5444-87AC-4719D5F20D15}" type="datetimeFigureOut">
               <a:rPr lang="en-US" smtClean="0"/>
-              <a:t>10/17/26</a:t>
+              <a:t>10/18/26</a:t>
             </a:fld>
             <a:endParaRPr lang="en-US"/>
           </a:p>
@@ -705,7 +705,7 @@
           <a:p>
             <a:fld id="{E759A0DE-F190-5444-87AC-4719D5F20D15}" type="datetimeFigureOut">
               <a:rPr lang="en-US" smtClean="0"/>
-              <a:t>10/17/26</a:t>
+              <a:t>10/18/26</a:t>
             </a:fld>
             <a:endParaRPr lang="en-US"/>
           </a:p>
@@ -903,7 +903,7 @@
           <a:p>
             <a:fld id="{E759A0DE-F190-5444-87AC-4719D5F20D15}" type="datetimeFigureOut">
               <a:rPr lang="en-US" smtClean="0"/>
-              <a:t>10/17/26</a:t>
+              <a:t>10/18/26</a:t>
             </a:fld>
             <a:endParaRPr lang="en-US"/>
           </a:p>
@@ -1178,7 +1178,7 @@
           <a:p>
             <a:fld id="{E759A0DE-F190-5444-87AC-4719D5F20D15}" type="datetimeFigureOut">
               <a:rPr lang="en-US" smtClean="0"/>
-              <a:t>10/17/26</a:t>
+              <a:t>10/18/26</a:t>
             </a:fld>
             <a:endParaRPr lang="en-US"/>
           </a:p>
@@ -1443,7 +1443,7 @@
           <a:p>
             <a:fld id="{E759A0DE-F190-5444-87AC-4719D5F20D15}" type="datetimeFigureOut">
               <a:rPr lang="en-US" smtClean="0"/>
-              <a:t>10/17/26</a:t>
+              <a:t>10/18/26</a:t>
             </a:fld>
             <a:endParaRPr lang="en-US"/>
           </a:p>
@@ -1855,7 +1855,7 @@
           <a:p>
             <a:fld id="{E759A0DE-F190-5444-87AC-4719D5F20D15}" type="datetimeFigureOut">
               <a:rPr lang="en-US" smtClean="0"/>
-              <a:t>10/17/26</a:t>
+              <a:t>10/18/26</a:t>
             </a:fld>
             <a:endParaRPr lang="en-US"/>
           </a:p>
@@ -1996,7 +1996,7 @@
           <a:p>
             <a:fld id="{E759A0DE-F190-5444-87AC-4719D5F20D15}" type="datetimeFigureOut">
               <a:rPr lang="en-US" smtClean="0"/>
-              <a:t>10/17/26</a:t>
+              <a:t>10/18/26</a:t>
             </a:fld>
             <a:endParaRPr lang="en-US"/>
           </a:p>
@@ -2109,7 +2109,7 @@
           <a:p>
             <a:fld id="{E759A0DE-F190-5444-87AC-4719D5F20D15}" type="datetimeFigureOut">
               <a:rPr lang="en-US" smtClean="0"/>
-              <a:t>10/17/26</a:t>
+              <a:t>10/18/26</a:t>
             </a:fld>
             <a:endParaRPr lang="en-US"/>
           </a:p>
@@ -2420,7 +2420,7 @@
           <a:p>
             <a:fld id="{E759A0DE-F190-5444-87AC-4719D5F20D15}" type="datetimeFigureOut">
               <a:rPr lang="en-US" smtClean="0"/>
-              <a:t>10/17/26</a:t>
+              <a:t>10/18/26</a:t>
             </a:fld>
             <a:endParaRPr lang="en-US"/>
           </a:p>
@@ -2708,7 +2708,7 @@
           <a:p>
             <a:fld id="{E759A0DE-F190-5444-87AC-4719D5F20D15}" type="datetimeFigureOut">
               <a:rPr lang="en-US" smtClean="0"/>
-              <a:t>10/17/26</a:t>
+              <a:t>10/18/26</a:t>
             </a:fld>
             <a:endParaRPr lang="en-US"/>
           </a:p>
@@ -2949,7 +2949,7 @@
           <a:p>
             <a:fld id="{E759A0DE-F190-5444-87AC-4719D5F20D15}" type="datetimeFigureOut">
               <a:rPr lang="en-US" smtClean="0"/>
-              <a:t>10/17/26</a:t>
+              <a:t>10/18/26</a:t>
             </a:fld>
             <a:endParaRPr lang="en-US"/>
           </a:p>
@@ -5617,8 +5617,25 @@
                 <a:latin typeface="Avenir Medium" panose="02000503020000020003" pitchFamily="2" charset="0"/>
                 <a:ea typeface="Bodoni Ornaments" pitchFamily="2" charset="0"/>
               </a:rPr>
-              <a:t>Nothing compares to the promise I have in You</a:t>
-            </a:r>
+              <a:t>Nothing compares to the promise I </a:t>
+            </a:r>
+            <a:r>
+              <a:rPr lang="en-US" sz="3600">
+                <a:solidFill>
+                  <a:schemeClr val="bg1"/>
+                </a:solidFill>
+                <a:latin typeface="Avenir Medium" panose="02000503020000020003" pitchFamily="2" charset="0"/>
+                <a:ea typeface="Bodoni Ornaments" pitchFamily="2" charset="0"/>
+              </a:rPr>
+              <a:t>have in</a:t>
+            </a:r>
+            <a:endParaRPr lang="en-US" sz="3600" dirty="0">
+              <a:solidFill>
+                <a:schemeClr val="bg1"/>
+              </a:solidFill>
+              <a:latin typeface="Avenir Medium" panose="02000503020000020003" pitchFamily="2" charset="0"/>
+              <a:ea typeface="Bodoni Ornaments" pitchFamily="2" charset="0"/>
+            </a:endParaRPr>
           </a:p>
         </p:txBody>
       </p:sp>
